--- a/Doc/Présentation/Présentation_DIMEN.pptx
+++ b/Doc/Présentation/Présentation_DIMEN.pptx
@@ -4179,14 +4179,14 @@
               <p:nvPr>
                 <p:extLst>
                   <p:ext uri="{D42A27DB-BD31-4B8C-83A1-F6EECF244321}">
-                    <p14:modId xmlns:p14="http://schemas.microsoft.com/office/powerpoint/2010/main" val="3857173192"/>
+                    <p14:modId xmlns:p14="http://schemas.microsoft.com/office/powerpoint/2010/main" val="2112303559"/>
                   </p:ext>
                 </p:extLst>
               </p:nvPr>
             </p:nvGraphicFramePr>
             <p:xfrm>
-              <a:off x="4313269" y="1899835"/>
-              <a:ext cx="423646" cy="489419"/>
+              <a:off x="4351562" y="1971015"/>
+              <a:ext cx="347059" cy="347058"/>
             </p:xfrm>
             <a:graphic>
               <a:graphicData uri="http://schemas.microsoft.com/office/drawing/2017/model3d">
@@ -4194,7 +4194,7 @@
                   <am3d:spPr>
                     <a:xfrm>
                       <a:off x="0" y="0"/>
-                      <a:ext cx="423646" cy="489419"/>
+                      <a:ext cx="347059" cy="347058"/>
                     </a:xfrm>
                     <a:prstGeom prst="rect">
                       <a:avLst/>
@@ -4214,7 +4214,7 @@
                       <am3d:sy n="1000000" d="1000000"/>
                       <am3d:sz n="1000000" d="1000000"/>
                     </am3d:scale>
-                    <am3d:rot ax="-1744065" ay="2792510" az="-1318394"/>
+                    <am3d:rot/>
                     <am3d:postTrans dx="0" dy="0" dz="0"/>
                   </am3d:trans>
                   <am3d:raster rName="Office3DRenderer" rVer="16.0.8326">
@@ -4276,8 +4276,8 @@
             </p:blipFill>
             <p:spPr>
               <a:xfrm>
-                <a:off x="4313269" y="1899835"/>
-                <a:ext cx="423646" cy="489419"/>
+                <a:off x="4351562" y="1971015"/>
+                <a:ext cx="347059" cy="347058"/>
               </a:xfrm>
               <a:prstGeom prst="rect">
                 <a:avLst/>
@@ -4479,13 +4479,13 @@
   <p:clrMapOvr>
     <a:masterClrMapping/>
   </p:clrMapOvr>
-  <mc:AlternateContent xmlns:mc="http://schemas.openxmlformats.org/markup-compatibility/2006">
-    <mc:Choice xmlns:p14="http://schemas.microsoft.com/office/powerpoint/2010/main" Requires="p14">
+  <mc:AlternateContent xmlns:mc="http://schemas.openxmlformats.org/markup-compatibility/2006" xmlns:p14="http://schemas.microsoft.com/office/powerpoint/2010/main">
+    <mc:Choice Requires="p14">
       <p:transition spd="slow" p14:dur="800">
         <p14:flythrough/>
       </p:transition>
     </mc:Choice>
-    <mc:Fallback>
+    <mc:Fallback xmlns="">
       <p:transition spd="slow">
         <p:fade/>
       </p:transition>
@@ -4888,8 +4888,8 @@
           <a:chExt cx="0" cy="0"/>
         </a:xfrm>
       </p:grpSpPr>
-      <mc:AlternateContent xmlns:mc="http://schemas.openxmlformats.org/markup-compatibility/2006">
-        <mc:Choice xmlns:am3d="http://schemas.microsoft.com/office/drawing/2017/model3d" Requires="am3d">
+      <mc:AlternateContent xmlns:mc="http://schemas.openxmlformats.org/markup-compatibility/2006" xmlns:am3d="http://schemas.microsoft.com/office/drawing/2017/model3d">
+        <mc:Choice Requires="am3d">
           <p:graphicFrame>
             <p:nvGraphicFramePr>
               <p:cNvPr id="19" name="Modèle 3D 18">
@@ -4979,7 +4979,7 @@
             </a:graphic>
           </p:graphicFrame>
         </mc:Choice>
-        <mc:Fallback>
+        <mc:Fallback xmlns="">
           <p:pic>
             <p:nvPicPr>
               <p:cNvPr id="19" name="Modèle 3D 18">
@@ -4995,7 +4995,7 @@
               <p:nvPr/>
             </p:nvPicPr>
             <p:blipFill>
-              <a:blip r:embed="rId4"/>
+              <a:blip r:embed="rId5"/>
               <a:stretch>
                 <a:fillRect/>
               </a:stretch>
@@ -5029,22 +5029,22 @@
               <p:nvPr>
                 <p:extLst>
                   <p:ext uri="{D42A27DB-BD31-4B8C-83A1-F6EECF244321}">
-                    <p14:modId xmlns:p14="http://schemas.microsoft.com/office/powerpoint/2010/main" val="1501382910"/>
+                    <p14:modId xmlns:p14="http://schemas.microsoft.com/office/powerpoint/2010/main" val="1095388529"/>
                   </p:ext>
                 </p:extLst>
               </p:nvPr>
             </p:nvGraphicFramePr>
             <p:xfrm>
-              <a:off x="10867475" y="7576458"/>
-              <a:ext cx="1190757" cy="1240971"/>
+              <a:off x="11345084" y="7707730"/>
+              <a:ext cx="705400" cy="735147"/>
             </p:xfrm>
             <a:graphic>
               <a:graphicData uri="http://schemas.microsoft.com/office/drawing/2017/model3d">
-                <am3d:model3d r:embed="rId5">
+                <am3d:model3d r:embed="rId6">
                   <am3d:spPr>
                     <a:xfrm>
                       <a:off x="0" y="0"/>
-                      <a:ext cx="1190757" cy="1240971"/>
+                      <a:ext cx="705400" cy="735147"/>
                     </a:xfrm>
                     <a:prstGeom prst="rect">
                       <a:avLst/>
@@ -5068,9 +5068,9 @@
                     <am3d:postTrans dx="0" dy="0" dz="0"/>
                   </am3d:trans>
                   <am3d:raster rName="Office3DRenderer" rVer="16.0.8326">
-                    <am3d:blip r:embed="rId6"/>
+                    <am3d:blip r:embed="rId7"/>
                   </am3d:raster>
-                  <am3d:objViewport viewportSz="1483969"/>
+                  <am3d:objViewport viewportSz="879098"/>
                   <am3d:ambientLight>
                     <am3d:clr>
                       <a:scrgbClr r="50000" g="50000" b="50000"/>
@@ -5119,15 +5119,15 @@
               <p:nvPr/>
             </p:nvPicPr>
             <p:blipFill>
-              <a:blip r:embed="rId6"/>
+              <a:blip r:embed="rId7"/>
               <a:stretch>
                 <a:fillRect/>
               </a:stretch>
             </p:blipFill>
             <p:spPr>
               <a:xfrm>
-                <a:off x="10867475" y="7576458"/>
-                <a:ext cx="1190757" cy="1240971"/>
+                <a:off x="11345084" y="7707730"/>
+                <a:ext cx="705400" cy="735147"/>
               </a:xfrm>
               <a:prstGeom prst="rect">
                 <a:avLst/>
@@ -5146,13 +5146,13 @@
   <p:clrMapOvr>
     <a:masterClrMapping/>
   </p:clrMapOvr>
-  <mc:AlternateContent xmlns:mc="http://schemas.openxmlformats.org/markup-compatibility/2006">
-    <mc:Choice xmlns:p14="http://schemas.microsoft.com/office/powerpoint/2010/main" Requires="p14">
+  <mc:AlternateContent xmlns:mc="http://schemas.openxmlformats.org/markup-compatibility/2006" xmlns:p14="http://schemas.microsoft.com/office/powerpoint/2010/main">
+    <mc:Choice Requires="p14">
       <p:transition spd="slow" p14:dur="800">
         <p14:flythrough/>
       </p:transition>
     </mc:Choice>
-    <mc:Fallback>
+    <mc:Fallback xmlns="">
       <p:transition spd="slow">
         <p:fade/>
       </p:transition>
@@ -5209,7 +5209,7 @@
                                     <p:cond delay="0"/>
                                   </p:stCondLst>
                                   <p:childTnLst>
-                                    <p:animMotion origin="layout" path="M -4.375E-6 1.11111E-6 L -4.375E-6 -0.30417 " pathEditMode="relative" rAng="0" ptsTypes="AA">
+                                    <p:animMotion origin="layout" path="M 4.79167E-6 -4.81481E-6 L -0.00079 -0.24953 " pathEditMode="relative" rAng="0" ptsTypes="AA">
                                       <p:cBhvr>
                                         <p:cTn id="8" dur="2000" fill="hold"/>
                                         <p:tgtEl>
@@ -5220,7 +5220,7 @@
                                           <p:attrName>ppt_y</p:attrName>
                                         </p:attrNameLst>
                                       </p:cBhvr>
-                                      <p:rCtr x="0" y="-15208"/>
+                                      <p:rCtr x="-39" y="-12477"/>
                                     </p:animMotion>
                                   </p:childTnLst>
                                 </p:cTn>
@@ -5403,19 +5403,19 @@
                                 </p:cTn>
                               </p:par>
                               <p:par>
-                                <p:cTn id="11" presetID="38" presetClass="emph" presetSubtype="128" repeatCount="indefinite" accel="50000" decel="50000" fill="hold" nodeType="withEffect">
+                                <p:cTn id="11" presetID="38" presetClass="emph" presetSubtype="2" repeatCount="indefinite" fill="hold" nodeType="withEffect">
                                   <p:stCondLst>
                                     <p:cond delay="0"/>
                                   </p:stCondLst>
                                   <p:childTnLst>
                                     <p:anim calcmode="lin" valueType="num">
                                       <p:cBhvr additive="sum">
-                                        <p:cTn id="12" dur="5000" fill="hold"/>
+                                        <p:cTn id="12" dur="10000" fill="hold"/>
                                         <p:tgtEl>
                                           <p:spTgt spid="21"/>
                                         </p:tgtEl>
                                         <p:attrNameLst>
-                                          <p:attrName>3d.view.rotation.y</p:attrName>
+                                          <p:attrName>3d.object.rotation.y</p:attrName>
                                         </p:attrNameLst>
                                       </p:cBhvr>
                                       <p:tavLst>
@@ -5426,147 +5426,147 @@
                                         </p:tav>
                                         <p:tav tm="3330">
                                           <p:val>
-                                            <p:fltVal val="6.9747"/>
+                                            <p:fltVal val="3.4873"/>
                                           </p:val>
                                         </p:tav>
                                         <p:tav tm="6660">
                                           <p:val>
-                                            <p:fltVal val="12.1039"/>
+                                            <p:fltVal val="6.0519"/>
                                           </p:val>
                                         </p:tav>
                                         <p:tav tm="9990">
                                           <p:val>
-                                            <p:fltVal val="15.6713"/>
+                                            <p:fltVal val="7.8356"/>
                                           </p:val>
                                         </p:tav>
                                         <p:tav tm="13320">
                                           <p:val>
-                                            <p:fltVal val="17.9604"/>
+                                            <p:fltVal val="8.9802"/>
                                           </p:val>
                                         </p:tav>
                                         <p:tav tm="16650">
                                           <p:val>
-                                            <p:fltVal val="19.2548"/>
+                                            <p:fltVal val="9.6274"/>
                                           </p:val>
                                         </p:tav>
                                         <p:tav tm="19970">
                                           <p:val>
-                                            <p:fltVal val="19.8371"/>
+                                            <p:fltVal val="9.9185"/>
                                           </p:val>
                                         </p:tav>
                                         <p:tav tm="23290">
                                           <p:val>
-                                            <p:fltVal val="19.9936"/>
+                                            <p:fltVal val="9.9968"/>
                                           </p:val>
                                         </p:tav>
                                         <p:tav tm="26620">
                                           <p:val>
-                                            <p:fltVal val="19.9945"/>
+                                            <p:fltVal val="9.9972"/>
                                           </p:val>
                                         </p:tav>
                                         <p:tav tm="29950">
                                           <p:val>
-                                            <p:fltVal val="19.8447"/>
+                                            <p:fltVal val="9.9223"/>
                                           </p:val>
                                         </p:tav>
                                         <p:tav tm="33280">
                                           <p:val>
-                                            <p:fltVal val="19.2733"/>
+                                            <p:fltVal val="9.6366"/>
                                           </p:val>
                                         </p:tav>
                                         <p:tav tm="36610">
                                           <p:val>
-                                            <p:fltVal val="17.9968"/>
+                                            <p:fltVal val="8.9984"/>
                                           </p:val>
                                         </p:tav>
                                         <p:tav tm="39940">
                                           <p:val>
-                                            <p:fltVal val="15.7316"/>
+                                            <p:fltVal val="7.8658"/>
                                           </p:val>
                                         </p:tav>
                                         <p:tav tm="43270">
                                           <p:val>
-                                            <p:fltVal val="12.194"/>
+                                            <p:fltVal val="6.097"/>
                                           </p:val>
                                         </p:tav>
                                         <p:tav tm="46600">
                                           <p:val>
-                                            <p:fltVal val="7.1005"/>
+                                            <p:fltVal val="3.5502"/>
                                           </p:val>
                                         </p:tav>
                                         <p:tav tm="49930">
                                           <p:val>
-                                            <p:fltVal val="0.1675"/>
+                                            <p:fltVal val="0.0837"/>
                                           </p:val>
                                         </p:tav>
                                         <p:tav tm="53250">
                                           <p:val>
-                                            <p:fltVal val="-6.8299"/>
+                                            <p:fltVal val="-3.4149"/>
                                           </p:val>
                                         </p:tav>
                                         <p:tav tm="56580">
                                           <p:val>
-                                            <p:fltVal val="-12.0002"/>
+                                            <p:fltVal val="-6.0001"/>
                                           </p:val>
                                         </p:tav>
                                         <p:tav tm="59900">
                                           <p:val>
-                                            <p:fltVal val="-15.593"/>
+                                            <p:fltVal val="-7.7965"/>
                                           </p:val>
                                         </p:tav>
                                         <p:tav tm="63220">
                                           <p:val>
-                                            <p:fltVal val="-17.9075"/>
+                                            <p:fltVal val="-8.9537"/>
                                           </p:val>
                                         </p:tav>
                                         <p:tav tm="66540">
                                           <p:val>
-                                            <p:fltVal val="-19.2249"/>
+                                            <p:fltVal val="-9.6124"/>
                                           </p:val>
                                         </p:tav>
                                         <p:tav tm="69870">
                                           <p:val>
-                                            <p:fltVal val="-19.8271"/>
+                                            <p:fltVal val="-9.9135"/>
                                           </p:val>
                                         </p:tav>
                                         <p:tav tm="73190">
                                           <p:val>
-                                            <p:fltVal val="-19.9924"/>
+                                            <p:fltVal val="-9.9962"/>
                                           </p:val>
                                         </p:tav>
                                         <p:tav tm="76510">
                                           <p:val>
-                                            <p:fltVal val="-19.9955"/>
+                                            <p:fltVal val="-9.9977"/>
                                           </p:val>
                                         </p:tav>
                                         <p:tav tm="79830">
                                           <p:val>
-                                            <p:fltVal val="-19.8557"/>
+                                            <p:fltVal val="-9.9278"/>
                                           </p:val>
                                         </p:tav>
                                         <p:tav tm="83160">
                                           <p:val>
-                                            <p:fltVal val="-19.3045"/>
+                                            <p:fltVal val="-9.6522"/>
                                           </p:val>
                                         </p:tav>
                                         <p:tav tm="86480">
                                           <p:val>
-                                            <p:fltVal val="-18.0634"/>
+                                            <p:fltVal val="-9.0317"/>
                                           </p:val>
                                         </p:tav>
                                         <p:tav tm="89800">
                                           <p:val>
-                                            <p:fltVal val="-15.8505"/>
+                                            <p:fltVal val="-7.9252"/>
                                           </p:val>
                                         </p:tav>
                                         <p:tav tm="93120">
                                           <p:val>
-                                            <p:fltVal val="-12.3847"/>
+                                            <p:fltVal val="-6.1923"/>
                                           </p:val>
                                         </p:tav>
                                         <p:tav tm="96450">
                                           <p:val>
-                                            <p:fltVal val="-7.3674"/>
+                                            <p:fltVal val="-3.6837"/>
                                           </p:val>
                                         </p:tav>
                                         <p:tav tm="100000">
@@ -5646,8 +5646,8 @@
           <a:chExt cx="0" cy="0"/>
         </a:xfrm>
       </p:grpSpPr>
-      <mc:AlternateContent xmlns:mc="http://schemas.openxmlformats.org/markup-compatibility/2006">
-        <mc:Choice xmlns:am3d="http://schemas.microsoft.com/office/drawing/2017/model3d" Requires="am3d">
+      <mc:AlternateContent xmlns:mc="http://schemas.openxmlformats.org/markup-compatibility/2006" xmlns:am3d="http://schemas.microsoft.com/office/drawing/2017/model3d">
+        <mc:Choice Requires="am3d">
           <p:graphicFrame>
             <p:nvGraphicFramePr>
               <p:cNvPr id="2" name="Modèle 3D 1">
@@ -5737,7 +5737,7 @@
             </a:graphic>
           </p:graphicFrame>
         </mc:Choice>
-        <mc:Fallback>
+        <mc:Fallback xmlns="">
           <p:pic>
             <p:nvPicPr>
               <p:cNvPr id="2" name="Modèle 3D 1">
@@ -5753,7 +5753,7 @@
               <p:nvPr/>
             </p:nvPicPr>
             <p:blipFill>
-              <a:blip r:embed="rId4"/>
+              <a:blip r:embed="rId5"/>
               <a:stretch>
                 <a:fillRect/>
               </a:stretch>
@@ -5780,13 +5780,13 @@
   <p:clrMapOvr>
     <a:masterClrMapping/>
   </p:clrMapOvr>
-  <mc:AlternateContent xmlns:mc="http://schemas.openxmlformats.org/markup-compatibility/2006">
-    <mc:Choice xmlns:p14="http://schemas.microsoft.com/office/powerpoint/2010/main" Requires="p14">
+  <mc:AlternateContent xmlns:mc="http://schemas.openxmlformats.org/markup-compatibility/2006" xmlns:p14="http://schemas.microsoft.com/office/powerpoint/2010/main">
+    <mc:Choice Requires="p14">
       <p:transition spd="slow" p14:dur="800">
         <p14:flythrough/>
       </p:transition>
     </mc:Choice>
-    <mc:Fallback>
+    <mc:Fallback xmlns="">
       <p:transition spd="slow">
         <p:fade/>
       </p:transition>
@@ -5831,8 +5831,8 @@
           <a:chExt cx="0" cy="0"/>
         </a:xfrm>
       </p:grpSpPr>
-      <mc:AlternateContent xmlns:mc="http://schemas.openxmlformats.org/markup-compatibility/2006">
-        <mc:Choice xmlns:am3d="http://schemas.microsoft.com/office/drawing/2017/model3d" Requires="am3d">
+      <mc:AlternateContent xmlns:mc="http://schemas.openxmlformats.org/markup-compatibility/2006" xmlns:am3d="http://schemas.microsoft.com/office/drawing/2017/model3d">
+        <mc:Choice Requires="am3d">
           <p:graphicFrame>
             <p:nvGraphicFramePr>
               <p:cNvPr id="3" name="Modèle 3D 2">
@@ -5922,7 +5922,7 @@
             </a:graphic>
           </p:graphicFrame>
         </mc:Choice>
-        <mc:Fallback>
+        <mc:Fallback xmlns="">
           <p:pic>
             <p:nvPicPr>
               <p:cNvPr id="3" name="Modèle 3D 2">
@@ -5938,7 +5938,7 @@
               <p:nvPr/>
             </p:nvPicPr>
             <p:blipFill>
-              <a:blip r:embed="rId4"/>
+              <a:blip r:embed="rId5"/>
               <a:stretch>
                 <a:fillRect/>
               </a:stretch>
@@ -5965,13 +5965,13 @@
   <p:clrMapOvr>
     <a:masterClrMapping/>
   </p:clrMapOvr>
-  <mc:AlternateContent xmlns:mc="http://schemas.openxmlformats.org/markup-compatibility/2006">
-    <mc:Choice xmlns:p14="http://schemas.microsoft.com/office/powerpoint/2010/main" Requires="p14">
+  <mc:AlternateContent xmlns:mc="http://schemas.openxmlformats.org/markup-compatibility/2006" xmlns:p14="http://schemas.microsoft.com/office/powerpoint/2010/main">
+    <mc:Choice Requires="p14">
       <p:transition spd="slow" p14:dur="800">
         <p14:flythrough/>
       </p:transition>
     </mc:Choice>
-    <mc:Fallback>
+    <mc:Fallback xmlns="">
       <p:transition spd="slow">
         <p:fade/>
       </p:transition>
@@ -6016,8 +6016,8 @@
           <a:chExt cx="0" cy="0"/>
         </a:xfrm>
       </p:grpSpPr>
-      <mc:AlternateContent xmlns:mc="http://schemas.openxmlformats.org/markup-compatibility/2006">
-        <mc:Choice xmlns:am3d="http://schemas.microsoft.com/office/drawing/2017/model3d" Requires="am3d">
+      <mc:AlternateContent xmlns:mc="http://schemas.openxmlformats.org/markup-compatibility/2006" xmlns:am3d="http://schemas.microsoft.com/office/drawing/2017/model3d">
+        <mc:Choice Requires="am3d">
           <p:graphicFrame>
             <p:nvGraphicFramePr>
               <p:cNvPr id="2" name="Modèle 3D 1">
@@ -6107,7 +6107,7 @@
             </a:graphic>
           </p:graphicFrame>
         </mc:Choice>
-        <mc:Fallback>
+        <mc:Fallback xmlns="">
           <p:pic>
             <p:nvPicPr>
               <p:cNvPr id="2" name="Modèle 3D 1">
@@ -6123,7 +6123,7 @@
               <p:nvPr/>
             </p:nvPicPr>
             <p:blipFill>
-              <a:blip r:embed="rId4"/>
+              <a:blip r:embed="rId5"/>
               <a:stretch>
                 <a:fillRect/>
               </a:stretch>
@@ -6150,13 +6150,13 @@
   <p:clrMapOvr>
     <a:masterClrMapping/>
   </p:clrMapOvr>
-  <mc:AlternateContent xmlns:mc="http://schemas.openxmlformats.org/markup-compatibility/2006">
-    <mc:Choice xmlns:p14="http://schemas.microsoft.com/office/powerpoint/2010/main" Requires="p14">
+  <mc:AlternateContent xmlns:mc="http://schemas.openxmlformats.org/markup-compatibility/2006" xmlns:p14="http://schemas.microsoft.com/office/powerpoint/2010/main">
+    <mc:Choice Requires="p14">
       <p:transition spd="slow" p14:dur="800">
         <p14:flythrough/>
       </p:transition>
     </mc:Choice>
-    <mc:Fallback>
+    <mc:Fallback xmlns="">
       <p:transition spd="slow">
         <p:fade/>
       </p:transition>
@@ -6201,8 +6201,8 @@
           <a:chExt cx="0" cy="0"/>
         </a:xfrm>
       </p:grpSpPr>
-      <mc:AlternateContent xmlns:mc="http://schemas.openxmlformats.org/markup-compatibility/2006">
-        <mc:Choice xmlns:am3d="http://schemas.microsoft.com/office/drawing/2017/model3d" Requires="am3d">
+      <mc:AlternateContent xmlns:mc="http://schemas.openxmlformats.org/markup-compatibility/2006" xmlns:am3d="http://schemas.microsoft.com/office/drawing/2017/model3d">
+        <mc:Choice Requires="am3d">
           <p:graphicFrame>
             <p:nvGraphicFramePr>
               <p:cNvPr id="3" name="Modèle 3D 2">
@@ -6292,7 +6292,7 @@
             </a:graphic>
           </p:graphicFrame>
         </mc:Choice>
-        <mc:Fallback>
+        <mc:Fallback xmlns="">
           <p:pic>
             <p:nvPicPr>
               <p:cNvPr id="3" name="Modèle 3D 2">
@@ -6308,7 +6308,7 @@
               <p:nvPr/>
             </p:nvPicPr>
             <p:blipFill>
-              <a:blip r:embed="rId4"/>
+              <a:blip r:embed="rId5"/>
               <a:stretch>
                 <a:fillRect/>
               </a:stretch>
@@ -6335,13 +6335,13 @@
   <p:clrMapOvr>
     <a:masterClrMapping/>
   </p:clrMapOvr>
-  <mc:AlternateContent xmlns:mc="http://schemas.openxmlformats.org/markup-compatibility/2006">
-    <mc:Choice xmlns:p14="http://schemas.microsoft.com/office/powerpoint/2010/main" Requires="p14">
+  <mc:AlternateContent xmlns:mc="http://schemas.openxmlformats.org/markup-compatibility/2006" xmlns:p14="http://schemas.microsoft.com/office/powerpoint/2010/main">
+    <mc:Choice Requires="p14">
       <p:transition spd="slow" p14:dur="800">
         <p14:flythrough/>
       </p:transition>
     </mc:Choice>
-    <mc:Fallback>
+    <mc:Fallback xmlns="">
       <p:transition spd="slow">
         <p:fade/>
       </p:transition>
